--- a/saif-competition-materials/03-video/athar-presentation.pptx
+++ b/saif-competition-materials/03-video/athar-presentation.pptx
@@ -1846,6 +1846,9 @@
       </p:sp>
     </p:spTree>
   </p:cSld>
+  <p:transition spd="med">
+    <p:fade/>
+  </p:transition>
   <p:clrMapOvr>
     <a:masterClrMapping/>
   </p:clrMapOvr>
@@ -2002,11 +2005,11 @@
         <p:spPr>
           <a:xfrm>
             <a:off x="632308" y="2377440"/>
-            <a:ext cx="10927080" cy="2880360"/>
+            <a:ext cx="10927080" cy="3200400"/>
           </a:xfrm>
           <a:prstGeom prst="roundRect">
             <a:avLst>
-              <a:gd name="adj" fmla="val 3810"/>
+              <a:gd name="adj" fmla="val 3429"/>
             </a:avLst>
           </a:prstGeom>
           <a:solidFill>
@@ -2094,24 +2097,27 @@
         </p:nvSpPr>
         <p:spPr>
           <a:xfrm>
-            <a:off x="9364828" y="3931920"/>
-            <a:ext cx="1874520" cy="457200"/>
-          </a:xfrm>
-          <a:prstGeom prst="rect">
-            <a:avLst/>
-          </a:prstGeom>
-          <a:noFill/>
-          <a:ln/>
-        </p:spPr>
-        <p:txBody>
-          <a:bodyPr wrap="square" lIns="0" tIns="0" rIns="0" bIns="0" rtlCol="0" anchor="ctr"/>
+            <a:off x="9337396" y="3886200"/>
+            <a:ext cx="1929384" cy="822960"/>
+          </a:xfrm>
+          <a:prstGeom prst="rect">
+            <a:avLst/>
+          </a:prstGeom>
+          <a:noFill/>
+          <a:ln/>
+        </p:spPr>
+        <p:txBody>
+          <a:bodyPr wrap="square" lIns="0" tIns="0" rIns="0" bIns="0" rtlCol="0" anchor="t"/>
           <a:lstStyle/>
           <a:p>
             <a:pPr rtl="1" algn="ctr" indent="0" marL="0">
-              <a:buNone/>
-            </a:pPr>
-            <a:r>
-              <a:rPr lang="en-US" sz="1400" b="1" dirty="0">
+              <a:lnSpc>
+                <a:spcPct val="115000"/>
+              </a:lnSpc>
+              <a:buNone/>
+            </a:pPr>
+            <a:r>
+              <a:rPr lang="en-US" sz="1250" b="1" dirty="0">
                 <a:solidFill>
                   <a:srgbClr val="0B1F3A"/>
                 </a:solidFill>
@@ -2121,7 +2127,7 @@
               </a:rPr>
               <a:t>تسجيل الرحلة</a:t>
             </a:r>
-            <a:endParaRPr lang="en-US" sz="1400" dirty="0"/>
+            <a:endParaRPr lang="en-US" sz="1250" dirty="0"/>
           </a:p>
         </p:txBody>
       </p:sp>
@@ -2231,24 +2237,27 @@
         </p:nvSpPr>
         <p:spPr>
           <a:xfrm>
-            <a:off x="7261708" y="3931920"/>
-            <a:ext cx="1874520" cy="457200"/>
-          </a:xfrm>
-          <a:prstGeom prst="rect">
-            <a:avLst/>
-          </a:prstGeom>
-          <a:noFill/>
-          <a:ln/>
-        </p:spPr>
-        <p:txBody>
-          <a:bodyPr wrap="square" lIns="0" tIns="0" rIns="0" bIns="0" rtlCol="0" anchor="ctr"/>
+            <a:off x="7234276" y="3886200"/>
+            <a:ext cx="1929384" cy="822960"/>
+          </a:xfrm>
+          <a:prstGeom prst="rect">
+            <a:avLst/>
+          </a:prstGeom>
+          <a:noFill/>
+          <a:ln/>
+        </p:spPr>
+        <p:txBody>
+          <a:bodyPr wrap="square" lIns="0" tIns="0" rIns="0" bIns="0" rtlCol="0" anchor="t"/>
           <a:lstStyle/>
           <a:p>
             <a:pPr rtl="1" algn="ctr" indent="0" marL="0">
-              <a:buNone/>
-            </a:pPr>
-            <a:r>
-              <a:rPr lang="en-US" sz="1400" b="1" dirty="0">
+              <a:lnSpc>
+                <a:spcPct val="115000"/>
+              </a:lnSpc>
+              <a:buNone/>
+            </a:pPr>
+            <a:r>
+              <a:rPr lang="en-US" sz="1250" b="1" dirty="0">
                 <a:solidFill>
                   <a:srgbClr val="0B1F3A"/>
                 </a:solidFill>
@@ -2258,7 +2267,7 @@
               </a:rPr>
               <a:t>حفظ المواقع</a:t>
             </a:r>
-            <a:endParaRPr lang="en-US" sz="1400" dirty="0"/>
+            <a:endParaRPr lang="en-US" sz="1250" dirty="0"/>
           </a:p>
         </p:txBody>
       </p:sp>
@@ -2368,24 +2377,27 @@
         </p:nvSpPr>
         <p:spPr>
           <a:xfrm>
-            <a:off x="5158588" y="3931920"/>
-            <a:ext cx="1874520" cy="457200"/>
-          </a:xfrm>
-          <a:prstGeom prst="rect">
-            <a:avLst/>
-          </a:prstGeom>
-          <a:noFill/>
-          <a:ln/>
-        </p:spPr>
-        <p:txBody>
-          <a:bodyPr wrap="square" lIns="0" tIns="0" rIns="0" bIns="0" rtlCol="0" anchor="ctr"/>
+            <a:off x="5131156" y="3886200"/>
+            <a:ext cx="1929384" cy="822960"/>
+          </a:xfrm>
+          <a:prstGeom prst="rect">
+            <a:avLst/>
+          </a:prstGeom>
+          <a:noFill/>
+          <a:ln/>
+        </p:spPr>
+        <p:txBody>
+          <a:bodyPr wrap="square" lIns="0" tIns="0" rIns="0" bIns="0" rtlCol="0" anchor="t"/>
           <a:lstStyle/>
           <a:p>
             <a:pPr rtl="1" algn="ctr" indent="0" marL="0">
-              <a:buNone/>
-            </a:pPr>
-            <a:r>
-              <a:rPr lang="en-US" sz="1400" b="1" dirty="0">
+              <a:lnSpc>
+                <a:spcPct val="115000"/>
+              </a:lnSpc>
+              <a:buNone/>
+            </a:pPr>
+            <a:r>
+              <a:rPr lang="en-US" sz="1250" b="1" dirty="0">
                 <a:solidFill>
                   <a:srgbClr val="0B1F3A"/>
                 </a:solidFill>
@@ -2395,7 +2407,7 @@
               </a:rPr>
               <a:t>تجاوز الموعد</a:t>
             </a:r>
-            <a:endParaRPr lang="en-US" sz="1400" dirty="0"/>
+            <a:endParaRPr lang="en-US" sz="1250" dirty="0"/>
           </a:p>
         </p:txBody>
       </p:sp>
@@ -2505,24 +2517,27 @@
         </p:nvSpPr>
         <p:spPr>
           <a:xfrm>
-            <a:off x="3055468" y="3931920"/>
-            <a:ext cx="1874520" cy="457200"/>
-          </a:xfrm>
-          <a:prstGeom prst="rect">
-            <a:avLst/>
-          </a:prstGeom>
-          <a:noFill/>
-          <a:ln/>
-        </p:spPr>
-        <p:txBody>
-          <a:bodyPr wrap="square" lIns="0" tIns="0" rIns="0" bIns="0" rtlCol="0" anchor="ctr"/>
+            <a:off x="3028036" y="3886200"/>
+            <a:ext cx="1929384" cy="822960"/>
+          </a:xfrm>
+          <a:prstGeom prst="rect">
+            <a:avLst/>
+          </a:prstGeom>
+          <a:noFill/>
+          <a:ln/>
+        </p:spPr>
+        <p:txBody>
+          <a:bodyPr wrap="square" lIns="0" tIns="0" rIns="0" bIns="0" rtlCol="0" anchor="t"/>
           <a:lstStyle/>
           <a:p>
             <a:pPr rtl="1" algn="ctr" indent="0" marL="0">
-              <a:buNone/>
-            </a:pPr>
-            <a:r>
-              <a:rPr lang="en-US" sz="1400" b="1" dirty="0">
+              <a:lnSpc>
+                <a:spcPct val="115000"/>
+              </a:lnSpc>
+              <a:buNone/>
+            </a:pPr>
+            <a:r>
+              <a:rPr lang="en-US" sz="1250" b="1" dirty="0">
                 <a:solidFill>
                   <a:srgbClr val="0B1F3A"/>
                 </a:solidFill>
@@ -2532,7 +2547,7 @@
               </a:rPr>
               <a:t>تنبيه فوري</a:t>
             </a:r>
-            <a:endParaRPr lang="en-US" sz="1400" dirty="0"/>
+            <a:endParaRPr lang="en-US" sz="1250" dirty="0"/>
           </a:p>
         </p:txBody>
       </p:sp>
@@ -2642,24 +2657,27 @@
         </p:nvSpPr>
         <p:spPr>
           <a:xfrm>
-            <a:off x="952348" y="3931920"/>
-            <a:ext cx="1874520" cy="457200"/>
-          </a:xfrm>
-          <a:prstGeom prst="rect">
-            <a:avLst/>
-          </a:prstGeom>
-          <a:noFill/>
-          <a:ln/>
-        </p:spPr>
-        <p:txBody>
-          <a:bodyPr wrap="square" lIns="0" tIns="0" rIns="0" bIns="0" rtlCol="0" anchor="ctr"/>
+            <a:off x="924916" y="3886200"/>
+            <a:ext cx="1929384" cy="822960"/>
+          </a:xfrm>
+          <a:prstGeom prst="rect">
+            <a:avLst/>
+          </a:prstGeom>
+          <a:noFill/>
+          <a:ln/>
+        </p:spPr>
+        <p:txBody>
+          <a:bodyPr wrap="square" lIns="0" tIns="0" rIns="0" bIns="0" rtlCol="0" anchor="t"/>
           <a:lstStyle/>
           <a:p>
             <a:pPr rtl="1" algn="ctr" indent="0" marL="0">
-              <a:buNone/>
-            </a:pPr>
-            <a:r>
-              <a:rPr lang="en-US" sz="1400" b="1" dirty="0">
+              <a:lnSpc>
+                <a:spcPct val="115000"/>
+              </a:lnSpc>
+              <a:buNone/>
+            </a:pPr>
+            <a:r>
+              <a:rPr lang="en-US" sz="1250" b="1" dirty="0">
                 <a:solidFill>
                   <a:srgbClr val="0B1F3A"/>
                 </a:solidFill>
@@ -2669,7 +2687,7 @@
               </a:rPr>
               <a:t>اقتراح مناطق البحث</a:t>
             </a:r>
-            <a:endParaRPr lang="en-US" sz="1400" dirty="0"/>
+            <a:endParaRPr lang="en-US" sz="1250" dirty="0"/>
           </a:p>
         </p:txBody>
       </p:sp>
@@ -2681,8 +2699,8 @@
         </p:nvSpPr>
         <p:spPr>
           <a:xfrm>
-            <a:off x="632308" y="4617720"/>
-            <a:ext cx="10927080" cy="548640"/>
+            <a:off x="632308" y="5074920"/>
+            <a:ext cx="10927080" cy="457200"/>
           </a:xfrm>
           <a:prstGeom prst="rect">
             <a:avLst/>
@@ -2698,7 +2716,7 @@
               <a:buNone/>
             </a:pPr>
             <a:r>
-              <a:rPr lang="en-US" sz="1250" i="1" dirty="0">
+              <a:rPr lang="en-US" sz="1200" i="1" dirty="0">
                 <a:solidFill>
                   <a:srgbClr val="5A6B87"/>
                 </a:solidFill>
@@ -2708,7 +2726,7 @@
               </a:rPr>
               <a:t>يستخدم الذكاء الاصطناعي عند الحاجة لاقتراح مناطق البحث وترتيب أولوياتها — وليس للتتبع المباشر بعد انقطاع الاتصال</a:t>
             </a:r>
-            <a:endParaRPr lang="en-US" sz="1250" dirty="0"/>
+            <a:endParaRPr lang="en-US" sz="1200" dirty="0"/>
           </a:p>
         </p:txBody>
       </p:sp>
@@ -2792,6 +2810,9 @@
       </p:sp>
     </p:spTree>
   </p:cSld>
+  <p:transition spd="med">
+    <p:fade/>
+  </p:transition>
   <p:clrMapOvr>
     <a:masterClrMapping/>
   </p:clrMapOvr>
@@ -2870,7 +2891,7 @@
         <p:spPr>
           <a:xfrm>
             <a:off x="640080" y="868680"/>
-            <a:ext cx="10911535" cy="731520"/>
+            <a:ext cx="10911535" cy="502920"/>
           </a:xfrm>
           <a:prstGeom prst="rect">
             <a:avLst/>
@@ -2908,12 +2929,12 @@
         </p:nvSpPr>
         <p:spPr>
           <a:xfrm>
-            <a:off x="3169768" y="1783080"/>
-            <a:ext cx="5852160" cy="3794760"/>
+            <a:off x="3169768" y="1874520"/>
+            <a:ext cx="5852160" cy="4206240"/>
           </a:xfrm>
           <a:prstGeom prst="roundRect">
             <a:avLst>
-              <a:gd name="adj" fmla="val 2892"/>
+              <a:gd name="adj" fmla="val 2609"/>
             </a:avLst>
           </a:prstGeom>
           <a:solidFill>
@@ -2942,7 +2963,7 @@
         </p:nvSpPr>
         <p:spPr>
           <a:xfrm>
-            <a:off x="3489808" y="2057400"/>
+            <a:off x="3489808" y="2148840"/>
             <a:ext cx="5212080" cy="502920"/>
           </a:xfrm>
           <a:prstGeom prst="roundRect">
@@ -2964,7 +2985,7 @@
         </p:nvSpPr>
         <p:spPr>
           <a:xfrm>
-            <a:off x="3672688" y="2057400"/>
+            <a:off x="3672688" y="2148840"/>
             <a:ext cx="4846320" cy="502920"/>
           </a:xfrm>
           <a:prstGeom prst="rect">
@@ -3003,7 +3024,7 @@
         </p:nvSpPr>
         <p:spPr>
           <a:xfrm>
-            <a:off x="8176108" y="2811780"/>
+            <a:off x="8176108" y="2994660"/>
             <a:ext cx="502920" cy="502920"/>
           </a:xfrm>
           <a:prstGeom prst="ellipse">
@@ -3023,8 +3044,8 @@
         </p:nvSpPr>
         <p:spPr>
           <a:xfrm>
-            <a:off x="3489808" y="2743200"/>
-            <a:ext cx="4663440" cy="320040"/>
+            <a:off x="3489808" y="2880360"/>
+            <a:ext cx="4663440" cy="274320"/>
           </a:xfrm>
           <a:prstGeom prst="rect">
             <a:avLst/>
@@ -3040,7 +3061,7 @@
               <a:buNone/>
             </a:pPr>
             <a:r>
-              <a:rPr lang="en-US" sz="1200" dirty="0">
+              <a:rPr lang="en-US" sz="1150" dirty="0">
                 <a:solidFill>
                   <a:srgbClr val="5A6B87"/>
                 </a:solidFill>
@@ -3050,7 +3071,7 @@
               </a:rPr>
               <a:t>الوجهة</a:t>
             </a:r>
-            <a:endParaRPr lang="en-US" sz="1200" dirty="0"/>
+            <a:endParaRPr lang="en-US" sz="1150" dirty="0"/>
           </a:p>
         </p:txBody>
       </p:sp>
@@ -3062,8 +3083,8 @@
         </p:nvSpPr>
         <p:spPr>
           <a:xfrm>
-            <a:off x="3489808" y="3044952"/>
-            <a:ext cx="4663440" cy="365760"/>
+            <a:off x="3489808" y="3154680"/>
+            <a:ext cx="4663440" cy="457200"/>
           </a:xfrm>
           <a:prstGeom prst="rect">
             <a:avLst/>
@@ -3076,10 +3097,13 @@
           <a:lstStyle/>
           <a:p>
             <a:pPr rtl="1" algn="r" indent="0" marL="0">
-              <a:buNone/>
-            </a:pPr>
-            <a:r>
-              <a:rPr lang="en-US" sz="1550" b="1" dirty="0">
+              <a:lnSpc>
+                <a:spcPct val="115000"/>
+              </a:lnSpc>
+              <a:buNone/>
+            </a:pPr>
+            <a:r>
+              <a:rPr lang="en-US" sz="1450" b="1" dirty="0">
                 <a:solidFill>
                   <a:srgbClr val="0B1F3A"/>
                 </a:solidFill>
@@ -3089,7 +3113,7 @@
               </a:rPr>
               <a:t>واحة الشعيب — طريق ٤١٢ البري</a:t>
             </a:r>
-            <a:endParaRPr lang="en-US" sz="1550" dirty="0"/>
+            <a:endParaRPr lang="en-US" sz="1450" dirty="0"/>
           </a:p>
         </p:txBody>
       </p:sp>
@@ -3101,7 +3125,7 @@
         </p:nvSpPr>
         <p:spPr>
           <a:xfrm>
-            <a:off x="8176108" y="3515868"/>
+            <a:off x="8176108" y="3771900"/>
             <a:ext cx="502920" cy="502920"/>
           </a:xfrm>
           <a:prstGeom prst="ellipse">
@@ -3121,8 +3145,8 @@
         </p:nvSpPr>
         <p:spPr>
           <a:xfrm>
-            <a:off x="3489808" y="3447288"/>
-            <a:ext cx="4663440" cy="320040"/>
+            <a:off x="3489808" y="3657600"/>
+            <a:ext cx="4663440" cy="274320"/>
           </a:xfrm>
           <a:prstGeom prst="rect">
             <a:avLst/>
@@ -3138,7 +3162,7 @@
               <a:buNone/>
             </a:pPr>
             <a:r>
-              <a:rPr lang="en-US" sz="1200" dirty="0">
+              <a:rPr lang="en-US" sz="1150" dirty="0">
                 <a:solidFill>
                   <a:srgbClr val="5A6B87"/>
                 </a:solidFill>
@@ -3148,7 +3172,7 @@
               </a:rPr>
               <a:t>موعد الاطمئنان القادم</a:t>
             </a:r>
-            <a:endParaRPr lang="en-US" sz="1200" dirty="0"/>
+            <a:endParaRPr lang="en-US" sz="1150" dirty="0"/>
           </a:p>
         </p:txBody>
       </p:sp>
@@ -3160,8 +3184,8 @@
         </p:nvSpPr>
         <p:spPr>
           <a:xfrm>
-            <a:off x="3489808" y="3749040"/>
-            <a:ext cx="4663440" cy="365760"/>
+            <a:off x="3489808" y="3931920"/>
+            <a:ext cx="4663440" cy="457200"/>
           </a:xfrm>
           <a:prstGeom prst="rect">
             <a:avLst/>
@@ -3174,10 +3198,13 @@
           <a:lstStyle/>
           <a:p>
             <a:pPr rtl="1" algn="r" indent="0" marL="0">
-              <a:buNone/>
-            </a:pPr>
-            <a:r>
-              <a:rPr lang="en-US" sz="1550" b="1" dirty="0">
+              <a:lnSpc>
+                <a:spcPct val="115000"/>
+              </a:lnSpc>
+              <a:buNone/>
+            </a:pPr>
+            <a:r>
+              <a:rPr lang="en-US" sz="1450" b="1" dirty="0">
                 <a:solidFill>
                   <a:srgbClr val="0B1F3A"/>
                 </a:solidFill>
@@ -3187,7 +3214,7 @@
               </a:rPr>
               <a:t>اليوم — الساعة ٨:٠٠ مساءً</a:t>
             </a:r>
-            <a:endParaRPr lang="en-US" sz="1550" dirty="0"/>
+            <a:endParaRPr lang="en-US" sz="1450" dirty="0"/>
           </a:p>
         </p:txBody>
       </p:sp>
@@ -3199,7 +3226,7 @@
         </p:nvSpPr>
         <p:spPr>
           <a:xfrm>
-            <a:off x="8176108" y="4219956"/>
+            <a:off x="8176108" y="4549140"/>
             <a:ext cx="502920" cy="502920"/>
           </a:xfrm>
           <a:prstGeom prst="ellipse">
@@ -3219,8 +3246,8 @@
         </p:nvSpPr>
         <p:spPr>
           <a:xfrm>
-            <a:off x="3489808" y="4151376"/>
-            <a:ext cx="4663440" cy="320040"/>
+            <a:off x="3489808" y="4434840"/>
+            <a:ext cx="4663440" cy="274320"/>
           </a:xfrm>
           <a:prstGeom prst="rect">
             <a:avLst/>
@@ -3236,7 +3263,7 @@
               <a:buNone/>
             </a:pPr>
             <a:r>
-              <a:rPr lang="en-US" sz="1200" dirty="0">
+              <a:rPr lang="en-US" sz="1150" dirty="0">
                 <a:solidFill>
                   <a:srgbClr val="5A6B87"/>
                 </a:solidFill>
@@ -3246,7 +3273,7 @@
               </a:rPr>
               <a:t>الشخص الموثوق للمتابعة</a:t>
             </a:r>
-            <a:endParaRPr lang="en-US" sz="1200" dirty="0"/>
+            <a:endParaRPr lang="en-US" sz="1150" dirty="0"/>
           </a:p>
         </p:txBody>
       </p:sp>
@@ -3258,8 +3285,8 @@
         </p:nvSpPr>
         <p:spPr>
           <a:xfrm>
-            <a:off x="3489808" y="4453128"/>
-            <a:ext cx="4663440" cy="365760"/>
+            <a:off x="3489808" y="4709160"/>
+            <a:ext cx="4663440" cy="457200"/>
           </a:xfrm>
           <a:prstGeom prst="rect">
             <a:avLst/>
@@ -3272,10 +3299,13 @@
           <a:lstStyle/>
           <a:p>
             <a:pPr rtl="1" algn="r" indent="0" marL="0">
-              <a:buNone/>
-            </a:pPr>
-            <a:r>
-              <a:rPr lang="en-US" sz="1550" b="1" dirty="0">
+              <a:lnSpc>
+                <a:spcPct val="115000"/>
+              </a:lnSpc>
+              <a:buNone/>
+            </a:pPr>
+            <a:r>
+              <a:rPr lang="en-US" sz="1450" b="1" dirty="0">
                 <a:solidFill>
                   <a:srgbClr val="0B1F3A"/>
                 </a:solidFill>
@@ -3285,7 +3315,7 @@
               </a:rPr>
               <a:t>سالم العتيبي — أخ المسافر</a:t>
             </a:r>
-            <a:endParaRPr lang="en-US" sz="1550" dirty="0"/>
+            <a:endParaRPr lang="en-US" sz="1450" dirty="0"/>
           </a:p>
         </p:txBody>
       </p:sp>
@@ -3297,7 +3327,7 @@
         </p:nvSpPr>
         <p:spPr>
           <a:xfrm>
-            <a:off x="8176108" y="4924044"/>
+            <a:off x="8176108" y="5326380"/>
             <a:ext cx="502920" cy="502920"/>
           </a:xfrm>
           <a:prstGeom prst="ellipse">
@@ -3317,8 +3347,8 @@
         </p:nvSpPr>
         <p:spPr>
           <a:xfrm>
-            <a:off x="3489808" y="4855464"/>
-            <a:ext cx="4663440" cy="320040"/>
+            <a:off x="3489808" y="5212080"/>
+            <a:ext cx="4663440" cy="274320"/>
           </a:xfrm>
           <a:prstGeom prst="rect">
             <a:avLst/>
@@ -3334,7 +3364,7 @@
               <a:buNone/>
             </a:pPr>
             <a:r>
-              <a:rPr lang="en-US" sz="1200" dirty="0">
+              <a:rPr lang="en-US" sz="1150" dirty="0">
                 <a:solidFill>
                   <a:srgbClr val="5A6B87"/>
                 </a:solidFill>
@@ -3344,7 +3374,7 @@
               </a:rPr>
               <a:t>المركبة والركاب</a:t>
             </a:r>
-            <a:endParaRPr lang="en-US" sz="1200" dirty="0"/>
+            <a:endParaRPr lang="en-US" sz="1150" dirty="0"/>
           </a:p>
         </p:txBody>
       </p:sp>
@@ -3356,8 +3386,8 @@
         </p:nvSpPr>
         <p:spPr>
           <a:xfrm>
-            <a:off x="3489808" y="5157216"/>
-            <a:ext cx="4663440" cy="365760"/>
+            <a:off x="3489808" y="5486400"/>
+            <a:ext cx="4663440" cy="457200"/>
           </a:xfrm>
           <a:prstGeom prst="rect">
             <a:avLst/>
@@ -3370,10 +3400,13 @@
           <a:lstStyle/>
           <a:p>
             <a:pPr rtl="1" algn="r" indent="0" marL="0">
-              <a:buNone/>
-            </a:pPr>
-            <a:r>
-              <a:rPr lang="en-US" sz="1550" b="1" dirty="0">
+              <a:lnSpc>
+                <a:spcPct val="115000"/>
+              </a:lnSpc>
+              <a:buNone/>
+            </a:pPr>
+            <a:r>
+              <a:rPr lang="en-US" sz="1450" b="1" dirty="0">
                 <a:solidFill>
                   <a:srgbClr val="0B1F3A"/>
                 </a:solidFill>
@@ -3383,7 +3416,7 @@
               </a:rPr>
               <a:t>دفع رباعي أبيض — ٣ ركاب</a:t>
             </a:r>
-            <a:endParaRPr lang="en-US" sz="1550" dirty="0"/>
+            <a:endParaRPr lang="en-US" sz="1450" dirty="0"/>
           </a:p>
         </p:txBody>
       </p:sp>
@@ -3395,7 +3428,7 @@
         </p:nvSpPr>
         <p:spPr>
           <a:xfrm>
-            <a:off x="6644488" y="1280160"/>
+            <a:off x="6644488" y="1444752"/>
             <a:ext cx="2377440" cy="365760"/>
           </a:xfrm>
           <a:prstGeom prst="roundRect">
@@ -3417,7 +3450,7 @@
         </p:nvSpPr>
         <p:spPr>
           <a:xfrm>
-            <a:off x="6644488" y="1280160"/>
+            <a:off x="6644488" y="1444752"/>
             <a:ext cx="2377440" cy="365760"/>
           </a:xfrm>
           <a:prstGeom prst="rect">
@@ -3528,6 +3561,9 @@
       </p:sp>
     </p:spTree>
   </p:cSld>
+  <p:transition spd="med">
+    <p:fade/>
+  </p:transition>
   <p:clrMapOvr>
     <a:masterClrMapping/>
   </p:clrMapOvr>
@@ -3606,7 +3642,7 @@
         <p:spPr>
           <a:xfrm>
             <a:off x="640080" y="868680"/>
-            <a:ext cx="10911535" cy="731520"/>
+            <a:ext cx="10911535" cy="502920"/>
           </a:xfrm>
           <a:prstGeom prst="rect">
             <a:avLst/>
@@ -3644,12 +3680,12 @@
         </p:nvSpPr>
         <p:spPr>
           <a:xfrm>
-            <a:off x="3078328" y="1783080"/>
-            <a:ext cx="6035040" cy="3794760"/>
+            <a:off x="3078328" y="1874520"/>
+            <a:ext cx="6035040" cy="3931920"/>
           </a:xfrm>
           <a:prstGeom prst="roundRect">
             <a:avLst>
-              <a:gd name="adj" fmla="val 2892"/>
+              <a:gd name="adj" fmla="val 2791"/>
             </a:avLst>
           </a:prstGeom>
           <a:solidFill>
@@ -3678,7 +3714,7 @@
         </p:nvSpPr>
         <p:spPr>
           <a:xfrm>
-            <a:off x="3398368" y="2057400"/>
+            <a:off x="3398368" y="2148840"/>
             <a:ext cx="5394960" cy="502920"/>
           </a:xfrm>
           <a:prstGeom prst="roundRect">
@@ -3700,7 +3736,7 @@
         </p:nvSpPr>
         <p:spPr>
           <a:xfrm>
-            <a:off x="3581248" y="2057400"/>
+            <a:off x="3581248" y="2148840"/>
             <a:ext cx="5029200" cy="502920"/>
           </a:xfrm>
           <a:prstGeom prst="rect">
@@ -3739,12 +3775,12 @@
         </p:nvSpPr>
         <p:spPr>
           <a:xfrm>
-            <a:off x="3398368" y="2743200"/>
-            <a:ext cx="5394960" cy="914400"/>
+            <a:off x="3398368" y="2834640"/>
+            <a:ext cx="5394960" cy="1051560"/>
           </a:xfrm>
           <a:prstGeom prst="roundRect">
             <a:avLst>
-              <a:gd name="adj" fmla="val 10000"/>
+              <a:gd name="adj" fmla="val 8696"/>
             </a:avLst>
           </a:prstGeom>
           <a:solidFill>
@@ -3766,7 +3802,7 @@
         </p:nvSpPr>
         <p:spPr>
           <a:xfrm>
-            <a:off x="8198968" y="2971800"/>
+            <a:off x="8198968" y="3131820"/>
             <a:ext cx="457200" cy="457200"/>
           </a:xfrm>
           <a:prstGeom prst="ellipse">
@@ -3786,7 +3822,7 @@
         </p:nvSpPr>
         <p:spPr>
           <a:xfrm>
-            <a:off x="8198968" y="2971800"/>
+            <a:off x="8198968" y="3131820"/>
             <a:ext cx="457200" cy="457200"/>
           </a:xfrm>
           <a:prstGeom prst="rect">
@@ -3825,8 +3861,8 @@
         </p:nvSpPr>
         <p:spPr>
           <a:xfrm>
-            <a:off x="3581248" y="2862072"/>
-            <a:ext cx="4663440" cy="320040"/>
+            <a:off x="3581248" y="2953512"/>
+            <a:ext cx="4663440" cy="457200"/>
           </a:xfrm>
           <a:prstGeom prst="rect">
             <a:avLst/>
@@ -3839,10 +3875,13 @@
           <a:lstStyle/>
           <a:p>
             <a:pPr rtl="1" algn="r" indent="0" marL="0">
-              <a:buNone/>
-            </a:pPr>
-            <a:r>
-              <a:rPr lang="en-US" sz="1450" b="1" dirty="0">
+              <a:lnSpc>
+                <a:spcPct val="110000"/>
+              </a:lnSpc>
+              <a:buNone/>
+            </a:pPr>
+            <a:r>
+              <a:rPr lang="en-US" sz="1400" b="1" dirty="0">
                 <a:solidFill>
                   <a:srgbClr val="0B1F3A"/>
                 </a:solidFill>
@@ -3852,7 +3891,7 @@
               </a:rPr>
               <a:t>تنبيه: سالم لم يؤكد سلامته بعد موعد اطمئنانه</a:t>
             </a:r>
-            <a:endParaRPr lang="en-US" sz="1450" dirty="0"/>
+            <a:endParaRPr lang="en-US" sz="1400" dirty="0"/>
           </a:p>
         </p:txBody>
       </p:sp>
@@ -3864,8 +3903,8 @@
         </p:nvSpPr>
         <p:spPr>
           <a:xfrm>
-            <a:off x="3581248" y="3200400"/>
-            <a:ext cx="4663440" cy="320040"/>
+            <a:off x="3581248" y="3447288"/>
+            <a:ext cx="4663440" cy="365760"/>
           </a:xfrm>
           <a:prstGeom prst="rect">
             <a:avLst/>
@@ -3881,7 +3920,7 @@
               <a:buNone/>
             </a:pPr>
             <a:r>
-              <a:rPr lang="en-US" sz="1200" dirty="0">
+              <a:rPr lang="en-US" sz="1150" dirty="0">
                 <a:solidFill>
                   <a:srgbClr val="5A6B87"/>
                 </a:solidFill>
@@ -3891,7 +3930,7 @@
               </a:rPr>
               <a:t>آخر تحديث موقع: قبل ٣ ساعات و٤٠ دقيقة — بيانات تجريبية</a:t>
             </a:r>
-            <a:endParaRPr lang="en-US" sz="1200" dirty="0"/>
+            <a:endParaRPr lang="en-US" sz="1150" dirty="0"/>
           </a:p>
         </p:txBody>
       </p:sp>
@@ -3903,7 +3942,7 @@
         </p:nvSpPr>
         <p:spPr>
           <a:xfrm>
-            <a:off x="3398368" y="3886200"/>
+            <a:off x="3398368" y="4114800"/>
             <a:ext cx="5394960" cy="1463040"/>
           </a:xfrm>
           <a:prstGeom prst="rect">
@@ -3923,7 +3962,7 @@
               <a:buNone/>
             </a:pPr>
             <a:r>
-              <a:rPr lang="en-US" sz="1450" dirty="0">
+              <a:rPr lang="en-US" sz="1400" dirty="0">
                 <a:solidFill>
                   <a:srgbClr val="0B1F3A"/>
                 </a:solidFill>
@@ -3933,7 +3972,7 @@
               </a:rPr>
               <a:t>يستمر التطبيق بإرسال آخر المواقع تلقائيًا أثناء توفر الاتصال، وعند تجاوز المهلة المحددة يصل التنبيه للشخص المسؤول فورًا — حتى إن كان هاتف المسافر خارج التغطية في تلك اللحظة.</a:t>
             </a:r>
-            <a:endParaRPr lang="en-US" sz="1450" dirty="0"/>
+            <a:endParaRPr lang="en-US" sz="1400" dirty="0"/>
           </a:p>
         </p:txBody>
       </p:sp>
@@ -3945,7 +3984,7 @@
         </p:nvSpPr>
         <p:spPr>
           <a:xfrm>
-            <a:off x="6735928" y="1280160"/>
+            <a:off x="6735928" y="1444752"/>
             <a:ext cx="2377440" cy="365760"/>
           </a:xfrm>
           <a:prstGeom prst="roundRect">
@@ -3967,7 +4006,7 @@
         </p:nvSpPr>
         <p:spPr>
           <a:xfrm>
-            <a:off x="6735928" y="1280160"/>
+            <a:off x="6735928" y="1444752"/>
             <a:ext cx="2377440" cy="365760"/>
           </a:xfrm>
           <a:prstGeom prst="rect">
@@ -4078,6 +4117,9 @@
       </p:sp>
     </p:spTree>
   </p:cSld>
+  <p:transition spd="med">
+    <p:fade/>
+  </p:transition>
   <p:clrMapOvr>
     <a:masterClrMapping/>
   </p:clrMapOvr>
@@ -4156,7 +4198,7 @@
         <p:spPr>
           <a:xfrm>
             <a:off x="640080" y="868680"/>
-            <a:ext cx="10911535" cy="731520"/>
+            <a:ext cx="10911535" cy="502920"/>
           </a:xfrm>
           <a:prstGeom prst="rect">
             <a:avLst/>
@@ -4194,12 +4236,12 @@
         </p:nvSpPr>
         <p:spPr>
           <a:xfrm>
-            <a:off x="2712568" y="1783080"/>
-            <a:ext cx="6766560" cy="3794760"/>
+            <a:off x="2712568" y="1874520"/>
+            <a:ext cx="6766560" cy="4297680"/>
           </a:xfrm>
           <a:prstGeom prst="roundRect">
             <a:avLst>
-              <a:gd name="adj" fmla="val 2892"/>
+              <a:gd name="adj" fmla="val 2553"/>
             </a:avLst>
           </a:prstGeom>
           <a:solidFill>
@@ -4228,7 +4270,7 @@
         </p:nvSpPr>
         <p:spPr>
           <a:xfrm>
-            <a:off x="3078328" y="2057400"/>
+            <a:off x="3078328" y="2148840"/>
             <a:ext cx="6035040" cy="411480"/>
           </a:xfrm>
           <a:prstGeom prst="rect">
@@ -4267,8 +4309,8 @@
         </p:nvSpPr>
         <p:spPr>
           <a:xfrm>
-            <a:off x="3078328" y="2743200"/>
-            <a:ext cx="2377440" cy="384048"/>
+            <a:off x="3078328" y="2807208"/>
+            <a:ext cx="2103120" cy="274320"/>
           </a:xfrm>
           <a:prstGeom prst="rect">
             <a:avLst/>
@@ -4284,7 +4326,7 @@
               <a:buNone/>
             </a:pPr>
             <a:r>
-              <a:rPr lang="en-US" sz="1250" dirty="0">
+              <a:rPr lang="en-US" sz="1150" dirty="0">
                 <a:solidFill>
                   <a:srgbClr val="5A6B87"/>
                 </a:solidFill>
@@ -4294,7 +4336,7 @@
               </a:rPr>
               <a:t>الوجهة والمسار</a:t>
             </a:r>
-            <a:endParaRPr lang="en-US" sz="1250" dirty="0"/>
+            <a:endParaRPr lang="en-US" sz="1150" dirty="0"/>
           </a:p>
         </p:txBody>
       </p:sp>
@@ -4306,8 +4348,8 @@
         </p:nvSpPr>
         <p:spPr>
           <a:xfrm>
-            <a:off x="5547208" y="2743200"/>
-            <a:ext cx="3566160" cy="384048"/>
+            <a:off x="5181448" y="2798064"/>
+            <a:ext cx="3931920" cy="548640"/>
           </a:xfrm>
           <a:prstGeom prst="rect">
             <a:avLst/>
@@ -4320,10 +4362,13 @@
           <a:lstStyle/>
           <a:p>
             <a:pPr rtl="1" algn="r" indent="0" marL="0">
-              <a:buNone/>
-            </a:pPr>
-            <a:r>
-              <a:rPr lang="en-US" sz="1400" b="1" dirty="0">
+              <a:lnSpc>
+                <a:spcPct val="110000"/>
+              </a:lnSpc>
+              <a:buNone/>
+            </a:pPr>
+            <a:r>
+              <a:rPr lang="en-US" sz="1300" b="1" dirty="0">
                 <a:solidFill>
                   <a:srgbClr val="0B1F3A"/>
                 </a:solidFill>
@@ -4333,7 +4378,7 @@
               </a:rPr>
               <a:t>واحة الشعيب — طريق ٤١٢ البري</a:t>
             </a:r>
-            <a:endParaRPr lang="en-US" sz="1400" dirty="0"/>
+            <a:endParaRPr lang="en-US" sz="1300" dirty="0"/>
           </a:p>
         </p:txBody>
       </p:sp>
@@ -4345,8 +4390,8 @@
         </p:nvSpPr>
         <p:spPr>
           <a:xfrm>
-            <a:off x="2895448" y="3218688"/>
-            <a:ext cx="6400800" cy="566928"/>
+            <a:off x="2895448" y="3401568"/>
+            <a:ext cx="6400800" cy="658368"/>
           </a:xfrm>
           <a:prstGeom prst="rect">
             <a:avLst/>
@@ -4365,8 +4410,8 @@
         </p:nvSpPr>
         <p:spPr>
           <a:xfrm>
-            <a:off x="3078328" y="3310128"/>
-            <a:ext cx="2377440" cy="384048"/>
+            <a:off x="3078328" y="3465576"/>
+            <a:ext cx="2103120" cy="274320"/>
           </a:xfrm>
           <a:prstGeom prst="rect">
             <a:avLst/>
@@ -4382,7 +4427,7 @@
               <a:buNone/>
             </a:pPr>
             <a:r>
-              <a:rPr lang="en-US" sz="1250" dirty="0">
+              <a:rPr lang="en-US" sz="1150" dirty="0">
                 <a:solidFill>
                   <a:srgbClr val="5A6B87"/>
                 </a:solidFill>
@@ -4392,7 +4437,7 @@
               </a:rPr>
               <a:t>آخر موقع مستلم</a:t>
             </a:r>
-            <a:endParaRPr lang="en-US" sz="1250" dirty="0"/>
+            <a:endParaRPr lang="en-US" sz="1150" dirty="0"/>
           </a:p>
         </p:txBody>
       </p:sp>
@@ -4404,8 +4449,8 @@
         </p:nvSpPr>
         <p:spPr>
           <a:xfrm>
-            <a:off x="5547208" y="3310128"/>
-            <a:ext cx="3566160" cy="384048"/>
+            <a:off x="5181448" y="3456432"/>
+            <a:ext cx="3931920" cy="548640"/>
           </a:xfrm>
           <a:prstGeom prst="rect">
             <a:avLst/>
@@ -4418,10 +4463,13 @@
           <a:lstStyle/>
           <a:p>
             <a:pPr rtl="1" algn="r" indent="0" marL="0">
-              <a:buNone/>
-            </a:pPr>
-            <a:r>
-              <a:rPr lang="en-US" sz="1400" b="1" dirty="0">
+              <a:lnSpc>
+                <a:spcPct val="110000"/>
+              </a:lnSpc>
+              <a:buNone/>
+            </a:pPr>
+            <a:r>
+              <a:rPr lang="en-US" sz="1300" b="1" dirty="0">
                 <a:solidFill>
                   <a:srgbClr val="0B1F3A"/>
                 </a:solidFill>
@@ -4431,7 +4479,7 @@
               </a:rPr>
               <a:t>على بعد ٣٨ كم من الوجهة — ٥:٢٠ مساءً</a:t>
             </a:r>
-            <a:endParaRPr lang="en-US" sz="1400" dirty="0"/>
+            <a:endParaRPr lang="en-US" sz="1300" dirty="0"/>
           </a:p>
         </p:txBody>
       </p:sp>
@@ -4443,8 +4491,8 @@
         </p:nvSpPr>
         <p:spPr>
           <a:xfrm>
-            <a:off x="3078328" y="3877056"/>
-            <a:ext cx="2377440" cy="384048"/>
+            <a:off x="3078328" y="4123944"/>
+            <a:ext cx="2103120" cy="274320"/>
           </a:xfrm>
           <a:prstGeom prst="rect">
             <a:avLst/>
@@ -4460,7 +4508,7 @@
               <a:buNone/>
             </a:pPr>
             <a:r>
-              <a:rPr lang="en-US" sz="1250" dirty="0">
+              <a:rPr lang="en-US" sz="1150" dirty="0">
                 <a:solidFill>
                   <a:srgbClr val="5A6B87"/>
                 </a:solidFill>
@@ -4470,7 +4518,7 @@
               </a:rPr>
               <a:t>المركبة والركاب</a:t>
             </a:r>
-            <a:endParaRPr lang="en-US" sz="1250" dirty="0"/>
+            <a:endParaRPr lang="en-US" sz="1150" dirty="0"/>
           </a:p>
         </p:txBody>
       </p:sp>
@@ -4482,8 +4530,8 @@
         </p:nvSpPr>
         <p:spPr>
           <a:xfrm>
-            <a:off x="5547208" y="3877056"/>
-            <a:ext cx="3566160" cy="384048"/>
+            <a:off x="5181448" y="4114800"/>
+            <a:ext cx="3931920" cy="548640"/>
           </a:xfrm>
           <a:prstGeom prst="rect">
             <a:avLst/>
@@ -4496,10 +4544,13 @@
           <a:lstStyle/>
           <a:p>
             <a:pPr rtl="1" algn="r" indent="0" marL="0">
-              <a:buNone/>
-            </a:pPr>
-            <a:r>
-              <a:rPr lang="en-US" sz="1400" b="1" dirty="0">
+              <a:lnSpc>
+                <a:spcPct val="110000"/>
+              </a:lnSpc>
+              <a:buNone/>
+            </a:pPr>
+            <a:r>
+              <a:rPr lang="en-US" sz="1300" b="1" dirty="0">
                 <a:solidFill>
                   <a:srgbClr val="0B1F3A"/>
                 </a:solidFill>
@@ -4509,7 +4560,7 @@
               </a:rPr>
               <a:t>دفع رباعي أبيض — ٣ ركاب</a:t>
             </a:r>
-            <a:endParaRPr lang="en-US" sz="1400" dirty="0"/>
+            <a:endParaRPr lang="en-US" sz="1300" dirty="0"/>
           </a:p>
         </p:txBody>
       </p:sp>
@@ -4521,8 +4572,8 @@
         </p:nvSpPr>
         <p:spPr>
           <a:xfrm>
-            <a:off x="2895448" y="4352544"/>
-            <a:ext cx="6400800" cy="566928"/>
+            <a:off x="2895448" y="4718304"/>
+            <a:ext cx="6400800" cy="658368"/>
           </a:xfrm>
           <a:prstGeom prst="rect">
             <a:avLst/>
@@ -4541,8 +4592,8 @@
         </p:nvSpPr>
         <p:spPr>
           <a:xfrm>
-            <a:off x="3078328" y="4443984"/>
-            <a:ext cx="2377440" cy="384048"/>
+            <a:off x="3078328" y="4782312"/>
+            <a:ext cx="2103120" cy="274320"/>
           </a:xfrm>
           <a:prstGeom prst="rect">
             <a:avLst/>
@@ -4558,7 +4609,7 @@
               <a:buNone/>
             </a:pPr>
             <a:r>
-              <a:rPr lang="en-US" sz="1250" dirty="0">
+              <a:rPr lang="en-US" sz="1150" dirty="0">
                 <a:solidFill>
                   <a:srgbClr val="5A6B87"/>
                 </a:solidFill>
@@ -4568,7 +4619,7 @@
               </a:rPr>
               <a:t>جهة الاتصال</a:t>
             </a:r>
-            <a:endParaRPr lang="en-US" sz="1250" dirty="0"/>
+            <a:endParaRPr lang="en-US" sz="1150" dirty="0"/>
           </a:p>
         </p:txBody>
       </p:sp>
@@ -4580,8 +4631,8 @@
         </p:nvSpPr>
         <p:spPr>
           <a:xfrm>
-            <a:off x="5547208" y="4443984"/>
-            <a:ext cx="3566160" cy="384048"/>
+            <a:off x="5181448" y="4773168"/>
+            <a:ext cx="3931920" cy="548640"/>
           </a:xfrm>
           <a:prstGeom prst="rect">
             <a:avLst/>
@@ -4594,10 +4645,13 @@
           <a:lstStyle/>
           <a:p>
             <a:pPr rtl="1" algn="r" indent="0" marL="0">
-              <a:buNone/>
-            </a:pPr>
-            <a:r>
-              <a:rPr lang="en-US" sz="1400" b="1" dirty="0">
+              <a:lnSpc>
+                <a:spcPct val="110000"/>
+              </a:lnSpc>
+              <a:buNone/>
+            </a:pPr>
+            <a:r>
+              <a:rPr lang="en-US" sz="1300" b="1" dirty="0">
                 <a:solidFill>
                   <a:srgbClr val="0B1F3A"/>
                 </a:solidFill>
@@ -4607,7 +4661,7 @@
               </a:rPr>
               <a:t>سالم العتيبي — ٠٥xxxxxxxx</a:t>
             </a:r>
-            <a:endParaRPr lang="en-US" sz="1400" dirty="0"/>
+            <a:endParaRPr lang="en-US" sz="1300" dirty="0"/>
           </a:p>
         </p:txBody>
       </p:sp>
@@ -4619,7 +4673,7 @@
         </p:nvSpPr>
         <p:spPr>
           <a:xfrm>
-            <a:off x="7101688" y="5084064"/>
+            <a:off x="7101688" y="5468112"/>
             <a:ext cx="2011680" cy="457200"/>
           </a:xfrm>
           <a:prstGeom prst="roundRect">
@@ -4641,7 +4695,7 @@
         </p:nvSpPr>
         <p:spPr>
           <a:xfrm>
-            <a:off x="7101688" y="5084064"/>
+            <a:off x="7101688" y="5468112"/>
             <a:ext cx="2011680" cy="457200"/>
           </a:xfrm>
           <a:prstGeom prst="rect">
@@ -4680,7 +4734,7 @@
         </p:nvSpPr>
         <p:spPr>
           <a:xfrm>
-            <a:off x="2712568" y="1280160"/>
+            <a:off x="2712568" y="1444752"/>
             <a:ext cx="2377440" cy="365760"/>
           </a:xfrm>
           <a:prstGeom prst="roundRect">
@@ -4702,7 +4756,7 @@
         </p:nvSpPr>
         <p:spPr>
           <a:xfrm>
-            <a:off x="2712568" y="1280160"/>
+            <a:off x="2712568" y="1444752"/>
             <a:ext cx="2377440" cy="365760"/>
           </a:xfrm>
           <a:prstGeom prst="rect">
@@ -4813,6 +4867,9 @@
       </p:sp>
     </p:spTree>
   </p:cSld>
+  <p:transition spd="med">
+    <p:fade/>
+  </p:transition>
   <p:clrMapOvr>
     <a:masterClrMapping/>
   </p:clrMapOvr>
@@ -5879,6 +5936,9 @@
       </p:sp>
     </p:spTree>
   </p:cSld>
+  <p:transition spd="med">
+    <p:fade/>
+  </p:transition>
   <p:clrMapOvr>
     <a:masterClrMapping/>
   </p:clrMapOvr>
@@ -6751,6 +6811,9 @@
       </p:sp>
     </p:spTree>
   </p:cSld>
+  <p:transition spd="med">
+    <p:fade/>
+  </p:transition>
   <p:clrMapOvr>
     <a:masterClrMapping/>
   </p:clrMapOvr>
